--- a/docs/presentation/technical-presentation.pptx
+++ b/docs/presentation/technical-presentation.pptx
@@ -5,14 +5,14 @@
     <p:sldMasterId id="2147483648" r:id="rId1"/>
   </p:sldMasterIdLst>
   <p:sldIdLst>
-    <p:sldId id="256" r:id="rId7"/>
-    <p:sldId id="257" r:id="rId8"/>
-    <p:sldId id="258" r:id="rId9"/>
-    <p:sldId id="259" r:id="rId10"/>
-    <p:sldId id="260" r:id="rId11"/>
-    <p:sldId id="261" r:id="rId12"/>
+    <p:sldId id="256" r:id="rId2"/>
+    <p:sldId id="257" r:id="rId3"/>
+    <p:sldId id="258" r:id="rId4"/>
+    <p:sldId id="259" r:id="rId5"/>
+    <p:sldId id="260" r:id="rId6"/>
+    <p:sldId id="261" r:id="rId7"/>
   </p:sldIdLst>
-  <p:sldSz cx="12192000" cy="6858000" type="screen4x3"/>
+  <p:sldSz cx="12192000" cy="6858000"/>
   <p:notesSz cx="6858000" cy="9144000"/>
   <p:defaultTextStyle>
     <a:defPPr>
@@ -109,6 +109,22 @@
       </a:defRPr>
     </a:lvl9pPr>
   </p:defaultTextStyle>
+  <p:extLst>
+    <p:ext uri="{EFAFB233-063F-42B5-8137-9DF3F51BA10A}">
+      <p15:sldGuideLst xmlns:p15="http://schemas.microsoft.com/office/powerpoint/2012/main">
+        <p15:guide id="1" orient="horz" pos="2160">
+          <p15:clr>
+            <a:srgbClr val="A4A3A4"/>
+          </p15:clr>
+        </p15:guide>
+        <p15:guide id="2" pos="2880">
+          <p15:clr>
+            <a:srgbClr val="A4A3A4"/>
+          </p15:clr>
+        </p15:guide>
+      </p15:sldGuideLst>
+    </p:ext>
+  </p:extLst>
 </p:presentation>
 </file>
 
@@ -150,10 +166,9 @@
           <a:lstStyle/>
           <a:p>
             <a:r>
-              <a:rPr lang="en-US" smtClean="0"/>
+              <a:rPr lang="en-US"/>
               <a:t>Click to edit Master title style</a:t>
             </a:r>
-            <a:endParaRPr lang="en-US"/>
           </a:p>
         </p:txBody>
       </p:sp>
@@ -269,10 +284,9 @@
           </a:lstStyle>
           <a:p>
             <a:r>
-              <a:rPr lang="en-US" smtClean="0"/>
+              <a:rPr lang="en-US"/>
               <a:t>Click to edit Master subtitle style</a:t>
             </a:r>
-            <a:endParaRPr lang="en-US"/>
           </a:p>
         </p:txBody>
       </p:sp>
@@ -293,7 +307,7 @@
           <a:p>
             <a:fld id="{5BCAD085-E8A6-8845-BD4E-CB4CCA059FC4}" type="datetimeFigureOut">
               <a:rPr lang="en-US" smtClean="0"/>
-              <a:t>1/27/13</a:t>
+              <a:t>9/16/2026</a:t>
             </a:fld>
             <a:endParaRPr lang="en-US"/>
           </a:p>
@@ -387,10 +401,9 @@
           <a:lstStyle/>
           <a:p>
             <a:r>
-              <a:rPr lang="en-US" smtClean="0"/>
+              <a:rPr lang="en-US"/>
               <a:t>Click to edit Master title style</a:t>
             </a:r>
-            <a:endParaRPr lang="en-US"/>
           </a:p>
         </p:txBody>
       </p:sp>
@@ -411,38 +424,37 @@
           <a:p>
             <a:pPr lvl="0"/>
             <a:r>
-              <a:rPr lang="en-US" smtClean="0"/>
+              <a:rPr lang="en-US"/>
               <a:t>Click to edit Master text styles</a:t>
             </a:r>
           </a:p>
           <a:p>
             <a:pPr lvl="1"/>
             <a:r>
-              <a:rPr lang="en-US" smtClean="0"/>
+              <a:rPr lang="en-US"/>
               <a:t>Second level</a:t>
             </a:r>
           </a:p>
           <a:p>
             <a:pPr lvl="2"/>
             <a:r>
-              <a:rPr lang="en-US" smtClean="0"/>
+              <a:rPr lang="en-US"/>
               <a:t>Third level</a:t>
             </a:r>
           </a:p>
           <a:p>
             <a:pPr lvl="3"/>
             <a:r>
-              <a:rPr lang="en-US" smtClean="0"/>
+              <a:rPr lang="en-US"/>
               <a:t>Fourth level</a:t>
             </a:r>
           </a:p>
           <a:p>
             <a:pPr lvl="4"/>
             <a:r>
-              <a:rPr lang="en-US" smtClean="0"/>
+              <a:rPr lang="en-US"/>
               <a:t>Fifth level</a:t>
             </a:r>
-            <a:endParaRPr lang="en-US"/>
           </a:p>
         </p:txBody>
       </p:sp>
@@ -463,7 +475,7 @@
           <a:p>
             <a:fld id="{5BCAD085-E8A6-8845-BD4E-CB4CCA059FC4}" type="datetimeFigureOut">
               <a:rPr lang="en-US" smtClean="0"/>
-              <a:t>1/27/13</a:t>
+              <a:t>9/16/2026</a:t>
             </a:fld>
             <a:endParaRPr lang="en-US"/>
           </a:p>
@@ -562,10 +574,9 @@
           <a:lstStyle/>
           <a:p>
             <a:r>
-              <a:rPr lang="en-US" smtClean="0"/>
+              <a:rPr lang="en-US"/>
               <a:t>Click to edit Master title style</a:t>
             </a:r>
-            <a:endParaRPr lang="en-US"/>
           </a:p>
         </p:txBody>
       </p:sp>
@@ -591,38 +602,37 @@
           <a:p>
             <a:pPr lvl="0"/>
             <a:r>
-              <a:rPr lang="en-US" smtClean="0"/>
+              <a:rPr lang="en-US"/>
               <a:t>Click to edit Master text styles</a:t>
             </a:r>
           </a:p>
           <a:p>
             <a:pPr lvl="1"/>
             <a:r>
-              <a:rPr lang="en-US" smtClean="0"/>
+              <a:rPr lang="en-US"/>
               <a:t>Second level</a:t>
             </a:r>
           </a:p>
           <a:p>
             <a:pPr lvl="2"/>
             <a:r>
-              <a:rPr lang="en-US" smtClean="0"/>
+              <a:rPr lang="en-US"/>
               <a:t>Third level</a:t>
             </a:r>
           </a:p>
           <a:p>
             <a:pPr lvl="3"/>
             <a:r>
-              <a:rPr lang="en-US" smtClean="0"/>
+              <a:rPr lang="en-US"/>
               <a:t>Fourth level</a:t>
             </a:r>
           </a:p>
           <a:p>
             <a:pPr lvl="4"/>
             <a:r>
-              <a:rPr lang="en-US" smtClean="0"/>
+              <a:rPr lang="en-US"/>
               <a:t>Fifth level</a:t>
             </a:r>
-            <a:endParaRPr lang="en-US"/>
           </a:p>
         </p:txBody>
       </p:sp>
@@ -643,7 +653,7 @@
           <a:p>
             <a:fld id="{5BCAD085-E8A6-8845-BD4E-CB4CCA059FC4}" type="datetimeFigureOut">
               <a:rPr lang="en-US" smtClean="0"/>
-              <a:t>1/27/13</a:t>
+              <a:t>9/16/2026</a:t>
             </a:fld>
             <a:endParaRPr lang="en-US"/>
           </a:p>
@@ -737,10 +747,9 @@
           <a:lstStyle/>
           <a:p>
             <a:r>
-              <a:rPr lang="en-US" smtClean="0"/>
+              <a:rPr lang="en-US"/>
               <a:t>Click to edit Master title style</a:t>
             </a:r>
-            <a:endParaRPr lang="en-US"/>
           </a:p>
         </p:txBody>
       </p:sp>
@@ -761,38 +770,37 @@
           <a:p>
             <a:pPr lvl="0"/>
             <a:r>
-              <a:rPr lang="en-US" smtClean="0"/>
+              <a:rPr lang="en-US"/>
               <a:t>Click to edit Master text styles</a:t>
             </a:r>
           </a:p>
           <a:p>
             <a:pPr lvl="1"/>
             <a:r>
-              <a:rPr lang="en-US" smtClean="0"/>
+              <a:rPr lang="en-US"/>
               <a:t>Second level</a:t>
             </a:r>
           </a:p>
           <a:p>
             <a:pPr lvl="2"/>
             <a:r>
-              <a:rPr lang="en-US" smtClean="0"/>
+              <a:rPr lang="en-US"/>
               <a:t>Third level</a:t>
             </a:r>
           </a:p>
           <a:p>
             <a:pPr lvl="3"/>
             <a:r>
-              <a:rPr lang="en-US" smtClean="0"/>
+              <a:rPr lang="en-US"/>
               <a:t>Fourth level</a:t>
             </a:r>
           </a:p>
           <a:p>
             <a:pPr lvl="4"/>
             <a:r>
-              <a:rPr lang="en-US" smtClean="0"/>
+              <a:rPr lang="en-US"/>
               <a:t>Fifth level</a:t>
             </a:r>
-            <a:endParaRPr lang="en-US"/>
           </a:p>
         </p:txBody>
       </p:sp>
@@ -813,7 +821,7 @@
           <a:p>
             <a:fld id="{5BCAD085-E8A6-8845-BD4E-CB4CCA059FC4}" type="datetimeFigureOut">
               <a:rPr lang="en-US" smtClean="0"/>
-              <a:t>1/27/13</a:t>
+              <a:t>9/16/2026</a:t>
             </a:fld>
             <a:endParaRPr lang="en-US"/>
           </a:p>
@@ -916,10 +924,9 @@
           </a:lstStyle>
           <a:p>
             <a:r>
-              <a:rPr lang="en-US" smtClean="0"/>
+              <a:rPr lang="en-US"/>
               <a:t>Click to edit Master title style</a:t>
             </a:r>
-            <a:endParaRPr lang="en-US"/>
           </a:p>
         </p:txBody>
       </p:sp>
@@ -1036,7 +1043,7 @@
           <a:p>
             <a:pPr lvl="0"/>
             <a:r>
-              <a:rPr lang="en-US" smtClean="0"/>
+              <a:rPr lang="en-US"/>
               <a:t>Click to edit Master text styles</a:t>
             </a:r>
           </a:p>
@@ -1059,7 +1066,7 @@
           <a:p>
             <a:fld id="{5BCAD085-E8A6-8845-BD4E-CB4CCA059FC4}" type="datetimeFigureOut">
               <a:rPr lang="en-US" smtClean="0"/>
-              <a:t>1/27/13</a:t>
+              <a:t>9/16/2026</a:t>
             </a:fld>
             <a:endParaRPr lang="en-US"/>
           </a:p>
@@ -1153,10 +1160,9 @@
           <a:lstStyle/>
           <a:p>
             <a:r>
-              <a:rPr lang="en-US" smtClean="0"/>
+              <a:rPr lang="en-US"/>
               <a:t>Click to edit Master title style</a:t>
             </a:r>
-            <a:endParaRPr lang="en-US"/>
           </a:p>
         </p:txBody>
       </p:sp>
@@ -1210,38 +1216,37 @@
           <a:p>
             <a:pPr lvl="0"/>
             <a:r>
-              <a:rPr lang="en-US" smtClean="0"/>
+              <a:rPr lang="en-US"/>
               <a:t>Click to edit Master text styles</a:t>
             </a:r>
           </a:p>
           <a:p>
             <a:pPr lvl="1"/>
             <a:r>
-              <a:rPr lang="en-US" smtClean="0"/>
+              <a:rPr lang="en-US"/>
               <a:t>Second level</a:t>
             </a:r>
           </a:p>
           <a:p>
             <a:pPr lvl="2"/>
             <a:r>
-              <a:rPr lang="en-US" smtClean="0"/>
+              <a:rPr lang="en-US"/>
               <a:t>Third level</a:t>
             </a:r>
           </a:p>
           <a:p>
             <a:pPr lvl="3"/>
             <a:r>
-              <a:rPr lang="en-US" smtClean="0"/>
+              <a:rPr lang="en-US"/>
               <a:t>Fourth level</a:t>
             </a:r>
           </a:p>
           <a:p>
             <a:pPr lvl="4"/>
             <a:r>
-              <a:rPr lang="en-US" smtClean="0"/>
+              <a:rPr lang="en-US"/>
               <a:t>Fifth level</a:t>
             </a:r>
-            <a:endParaRPr lang="en-US"/>
           </a:p>
         </p:txBody>
       </p:sp>
@@ -1295,38 +1300,37 @@
           <a:p>
             <a:pPr lvl="0"/>
             <a:r>
-              <a:rPr lang="en-US" smtClean="0"/>
+              <a:rPr lang="en-US"/>
               <a:t>Click to edit Master text styles</a:t>
             </a:r>
           </a:p>
           <a:p>
             <a:pPr lvl="1"/>
             <a:r>
-              <a:rPr lang="en-US" smtClean="0"/>
+              <a:rPr lang="en-US"/>
               <a:t>Second level</a:t>
             </a:r>
           </a:p>
           <a:p>
             <a:pPr lvl="2"/>
             <a:r>
-              <a:rPr lang="en-US" smtClean="0"/>
+              <a:rPr lang="en-US"/>
               <a:t>Third level</a:t>
             </a:r>
           </a:p>
           <a:p>
             <a:pPr lvl="3"/>
             <a:r>
-              <a:rPr lang="en-US" smtClean="0"/>
+              <a:rPr lang="en-US"/>
               <a:t>Fourth level</a:t>
             </a:r>
           </a:p>
           <a:p>
             <a:pPr lvl="4"/>
             <a:r>
-              <a:rPr lang="en-US" smtClean="0"/>
+              <a:rPr lang="en-US"/>
               <a:t>Fifth level</a:t>
             </a:r>
-            <a:endParaRPr lang="en-US"/>
           </a:p>
         </p:txBody>
       </p:sp>
@@ -1347,7 +1351,7 @@
           <a:p>
             <a:fld id="{5BCAD085-E8A6-8845-BD4E-CB4CCA059FC4}" type="datetimeFigureOut">
               <a:rPr lang="en-US" smtClean="0"/>
-              <a:t>1/27/13</a:t>
+              <a:t>9/16/2026</a:t>
             </a:fld>
             <a:endParaRPr lang="en-US"/>
           </a:p>
@@ -1445,10 +1449,9 @@
           </a:lstStyle>
           <a:p>
             <a:r>
-              <a:rPr lang="en-US" smtClean="0"/>
+              <a:rPr lang="en-US"/>
               <a:t>Click to edit Master title style</a:t>
             </a:r>
-            <a:endParaRPr lang="en-US"/>
           </a:p>
         </p:txBody>
       </p:sp>
@@ -1511,7 +1514,7 @@
           <a:p>
             <a:pPr lvl="0"/>
             <a:r>
-              <a:rPr lang="en-US" smtClean="0"/>
+              <a:rPr lang="en-US"/>
               <a:t>Click to edit Master text styles</a:t>
             </a:r>
           </a:p>
@@ -1567,38 +1570,37 @@
           <a:p>
             <a:pPr lvl="0"/>
             <a:r>
-              <a:rPr lang="en-US" smtClean="0"/>
+              <a:rPr lang="en-US"/>
               <a:t>Click to edit Master text styles</a:t>
             </a:r>
           </a:p>
           <a:p>
             <a:pPr lvl="1"/>
             <a:r>
-              <a:rPr lang="en-US" smtClean="0"/>
+              <a:rPr lang="en-US"/>
               <a:t>Second level</a:t>
             </a:r>
           </a:p>
           <a:p>
             <a:pPr lvl="2"/>
             <a:r>
-              <a:rPr lang="en-US" smtClean="0"/>
+              <a:rPr lang="en-US"/>
               <a:t>Third level</a:t>
             </a:r>
           </a:p>
           <a:p>
             <a:pPr lvl="3"/>
             <a:r>
-              <a:rPr lang="en-US" smtClean="0"/>
+              <a:rPr lang="en-US"/>
               <a:t>Fourth level</a:t>
             </a:r>
           </a:p>
           <a:p>
             <a:pPr lvl="4"/>
             <a:r>
-              <a:rPr lang="en-US" smtClean="0"/>
+              <a:rPr lang="en-US"/>
               <a:t>Fifth level</a:t>
             </a:r>
-            <a:endParaRPr lang="en-US"/>
           </a:p>
         </p:txBody>
       </p:sp>
@@ -1661,7 +1663,7 @@
           <a:p>
             <a:pPr lvl="0"/>
             <a:r>
-              <a:rPr lang="en-US" smtClean="0"/>
+              <a:rPr lang="en-US"/>
               <a:t>Click to edit Master text styles</a:t>
             </a:r>
           </a:p>
@@ -1717,38 +1719,37 @@
           <a:p>
             <a:pPr lvl="0"/>
             <a:r>
-              <a:rPr lang="en-US" smtClean="0"/>
+              <a:rPr lang="en-US"/>
               <a:t>Click to edit Master text styles</a:t>
             </a:r>
           </a:p>
           <a:p>
             <a:pPr lvl="1"/>
             <a:r>
-              <a:rPr lang="en-US" smtClean="0"/>
+              <a:rPr lang="en-US"/>
               <a:t>Second level</a:t>
             </a:r>
           </a:p>
           <a:p>
             <a:pPr lvl="2"/>
             <a:r>
-              <a:rPr lang="en-US" smtClean="0"/>
+              <a:rPr lang="en-US"/>
               <a:t>Third level</a:t>
             </a:r>
           </a:p>
           <a:p>
             <a:pPr lvl="3"/>
             <a:r>
-              <a:rPr lang="en-US" smtClean="0"/>
+              <a:rPr lang="en-US"/>
               <a:t>Fourth level</a:t>
             </a:r>
           </a:p>
           <a:p>
             <a:pPr lvl="4"/>
             <a:r>
-              <a:rPr lang="en-US" smtClean="0"/>
+              <a:rPr lang="en-US"/>
               <a:t>Fifth level</a:t>
             </a:r>
-            <a:endParaRPr lang="en-US"/>
           </a:p>
         </p:txBody>
       </p:sp>
@@ -1769,7 +1770,7 @@
           <a:p>
             <a:fld id="{5BCAD085-E8A6-8845-BD4E-CB4CCA059FC4}" type="datetimeFigureOut">
               <a:rPr lang="en-US" smtClean="0"/>
-              <a:t>1/27/13</a:t>
+              <a:t>9/16/2026</a:t>
             </a:fld>
             <a:endParaRPr lang="en-US"/>
           </a:p>
@@ -1863,10 +1864,9 @@
           <a:lstStyle/>
           <a:p>
             <a:r>
-              <a:rPr lang="en-US" smtClean="0"/>
+              <a:rPr lang="en-US"/>
               <a:t>Click to edit Master title style</a:t>
             </a:r>
-            <a:endParaRPr lang="en-US"/>
           </a:p>
         </p:txBody>
       </p:sp>
@@ -1887,7 +1887,7 @@
           <a:p>
             <a:fld id="{5BCAD085-E8A6-8845-BD4E-CB4CCA059FC4}" type="datetimeFigureOut">
               <a:rPr lang="en-US" smtClean="0"/>
-              <a:t>1/27/13</a:t>
+              <a:t>9/16/2026</a:t>
             </a:fld>
             <a:endParaRPr lang="en-US"/>
           </a:p>
@@ -1982,7 +1982,7 @@
           <a:p>
             <a:fld id="{5BCAD085-E8A6-8845-BD4E-CB4CCA059FC4}" type="datetimeFigureOut">
               <a:rPr lang="en-US" smtClean="0"/>
-              <a:t>1/27/13</a:t>
+              <a:t>9/16/2026</a:t>
             </a:fld>
             <a:endParaRPr lang="en-US"/>
           </a:p>
@@ -2085,10 +2085,9 @@
           </a:lstStyle>
           <a:p>
             <a:r>
-              <a:rPr lang="en-US" smtClean="0"/>
+              <a:rPr lang="en-US"/>
               <a:t>Click to edit Master title style</a:t>
             </a:r>
-            <a:endParaRPr lang="en-US"/>
           </a:p>
         </p:txBody>
       </p:sp>
@@ -2142,38 +2141,37 @@
           <a:p>
             <a:pPr lvl="0"/>
             <a:r>
-              <a:rPr lang="en-US" smtClean="0"/>
+              <a:rPr lang="en-US"/>
               <a:t>Click to edit Master text styles</a:t>
             </a:r>
           </a:p>
           <a:p>
             <a:pPr lvl="1"/>
             <a:r>
-              <a:rPr lang="en-US" smtClean="0"/>
+              <a:rPr lang="en-US"/>
               <a:t>Second level</a:t>
             </a:r>
           </a:p>
           <a:p>
             <a:pPr lvl="2"/>
             <a:r>
-              <a:rPr lang="en-US" smtClean="0"/>
+              <a:rPr lang="en-US"/>
               <a:t>Third level</a:t>
             </a:r>
           </a:p>
           <a:p>
             <a:pPr lvl="3"/>
             <a:r>
-              <a:rPr lang="en-US" smtClean="0"/>
+              <a:rPr lang="en-US"/>
               <a:t>Fourth level</a:t>
             </a:r>
           </a:p>
           <a:p>
             <a:pPr lvl="4"/>
             <a:r>
-              <a:rPr lang="en-US" smtClean="0"/>
+              <a:rPr lang="en-US"/>
               <a:t>Fifth level</a:t>
             </a:r>
-            <a:endParaRPr lang="en-US"/>
           </a:p>
         </p:txBody>
       </p:sp>
@@ -2236,7 +2234,7 @@
           <a:p>
             <a:pPr lvl="0"/>
             <a:r>
-              <a:rPr lang="en-US" smtClean="0"/>
+              <a:rPr lang="en-US"/>
               <a:t>Click to edit Master text styles</a:t>
             </a:r>
           </a:p>
@@ -2259,7 +2257,7 @@
           <a:p>
             <a:fld id="{5BCAD085-E8A6-8845-BD4E-CB4CCA059FC4}" type="datetimeFigureOut">
               <a:rPr lang="en-US" smtClean="0"/>
-              <a:t>1/27/13</a:t>
+              <a:t>9/16/2026</a:t>
             </a:fld>
             <a:endParaRPr lang="en-US"/>
           </a:p>
@@ -2362,10 +2360,9 @@
           </a:lstStyle>
           <a:p>
             <a:r>
-              <a:rPr lang="en-US" smtClean="0"/>
+              <a:rPr lang="en-US"/>
               <a:t>Click to edit Master title style</a:t>
             </a:r>
-            <a:endParaRPr lang="en-US"/>
           </a:p>
         </p:txBody>
       </p:sp>
@@ -2489,7 +2486,7 @@
           <a:p>
             <a:pPr lvl="0"/>
             <a:r>
-              <a:rPr lang="en-US" smtClean="0"/>
+              <a:rPr lang="en-US"/>
               <a:t>Click to edit Master text styles</a:t>
             </a:r>
           </a:p>
@@ -2512,7 +2509,7 @@
           <a:p>
             <a:fld id="{5BCAD085-E8A6-8845-BD4E-CB4CCA059FC4}" type="datetimeFigureOut">
               <a:rPr lang="en-US" smtClean="0"/>
-              <a:t>1/27/13</a:t>
+              <a:t>9/16/2026</a:t>
             </a:fld>
             <a:endParaRPr lang="en-US"/>
           </a:p>
@@ -2621,10 +2618,9 @@
           <a:lstStyle/>
           <a:p>
             <a:r>
-              <a:rPr lang="en-US" smtClean="0"/>
+              <a:rPr lang="en-US"/>
               <a:t>Click to edit Master title style</a:t>
             </a:r>
-            <a:endParaRPr lang="en-US"/>
           </a:p>
         </p:txBody>
       </p:sp>
@@ -2655,38 +2651,37 @@
           <a:p>
             <a:pPr lvl="0"/>
             <a:r>
-              <a:rPr lang="en-US" smtClean="0"/>
+              <a:rPr lang="en-US"/>
               <a:t>Click to edit Master text styles</a:t>
             </a:r>
           </a:p>
           <a:p>
             <a:pPr lvl="1"/>
             <a:r>
-              <a:rPr lang="en-US" smtClean="0"/>
+              <a:rPr lang="en-US"/>
               <a:t>Second level</a:t>
             </a:r>
           </a:p>
           <a:p>
             <a:pPr lvl="2"/>
             <a:r>
-              <a:rPr lang="en-US" smtClean="0"/>
+              <a:rPr lang="en-US"/>
               <a:t>Third level</a:t>
             </a:r>
           </a:p>
           <a:p>
             <a:pPr lvl="3"/>
             <a:r>
-              <a:rPr lang="en-US" smtClean="0"/>
+              <a:rPr lang="en-US"/>
               <a:t>Fourth level</a:t>
             </a:r>
           </a:p>
           <a:p>
             <a:pPr lvl="4"/>
             <a:r>
-              <a:rPr lang="en-US" smtClean="0"/>
+              <a:rPr lang="en-US"/>
               <a:t>Fifth level</a:t>
             </a:r>
-            <a:endParaRPr lang="en-US"/>
           </a:p>
         </p:txBody>
       </p:sp>
@@ -2725,7 +2720,7 @@
           <a:p>
             <a:fld id="{5BCAD085-E8A6-8845-BD4E-CB4CCA059FC4}" type="datetimeFigureOut">
               <a:rPr lang="en-US" smtClean="0"/>
-              <a:t>1/27/13</a:t>
+              <a:t>9/16/2026</a:t>
             </a:fld>
             <a:endParaRPr lang="en-US"/>
           </a:p>
@@ -3084,7 +3079,7 @@
 </file>
 
 <file path=ppt/slides/slide1.xml><?xml version="1.0" encoding="utf-8"?>
-<p:sld xmlns:a="http://schemas.openxmlformats.org/drawingml/2006/main" xmlns:p="http://schemas.openxmlformats.org/presentationml/2006/main" xmlns:r="http://schemas.openxmlformats.org/officeDocument/2006/relationships">
+<p:sld xmlns:a="http://schemas.openxmlformats.org/drawingml/2006/main" xmlns:r="http://schemas.openxmlformats.org/officeDocument/2006/relationships" xmlns:p="http://schemas.openxmlformats.org/presentationml/2006/main">
   <p:cSld>
     <p:bg>
       <p:bgPr>
@@ -3100,7 +3095,14 @@
         <p:cNvGrpSpPr/>
         <p:nvPr/>
       </p:nvGrpSpPr>
-      <p:grpSpPr/>
+      <p:grpSpPr>
+        <a:xfrm>
+          <a:off x="0" y="0"/>
+          <a:ext cx="0" cy="0"/>
+          <a:chOff x="0" y="0"/>
+          <a:chExt cx="0" cy="0"/>
+        </a:xfrm>
+      </p:grpSpPr>
       <p:sp>
         <p:nvSpPr>
           <p:cNvPr id="2" name="TextBox 1"/>
@@ -3118,7 +3120,7 @@
           <a:noFill/>
         </p:spPr>
         <p:txBody>
-          <a:bodyPr wrap="none" lIns="0" rIns="0" tIns="0" bIns="0">
+          <a:bodyPr wrap="none" lIns="0" tIns="0" rIns="0" bIns="0">
             <a:noAutofit/>
           </a:bodyPr>
           <a:lstStyle/>
@@ -3163,7 +3165,7 @@
           <a:noFill/>
         </p:spPr>
         <p:txBody>
-          <a:bodyPr wrap="none" lIns="0" rIns="0" tIns="0" bIns="0">
+          <a:bodyPr wrap="none" lIns="0" tIns="0" rIns="0" bIns="0">
             <a:noAutofit/>
           </a:bodyPr>
           <a:lstStyle/>
@@ -3208,7 +3210,7 @@
           <a:noFill/>
         </p:spPr>
         <p:txBody>
-          <a:bodyPr wrap="none" lIns="0" rIns="0" tIns="0" bIns="0">
+          <a:bodyPr wrap="none" lIns="0" tIns="0" rIns="0" bIns="0">
             <a:noAutofit/>
           </a:bodyPr>
           <a:lstStyle/>
@@ -3253,7 +3255,7 @@
           <a:noFill/>
         </p:spPr>
         <p:txBody>
-          <a:bodyPr wrap="none" lIns="0" rIns="0" tIns="0" bIns="0">
+          <a:bodyPr wrap="none" lIns="0" tIns="0" rIns="0" bIns="0">
             <a:noAutofit/>
           </a:bodyPr>
           <a:lstStyle/>
@@ -3298,7 +3300,7 @@
           <a:noFill/>
         </p:spPr>
         <p:txBody>
-          <a:bodyPr wrap="none" lIns="0" rIns="0" tIns="0" bIns="0">
+          <a:bodyPr wrap="none" lIns="0" tIns="0" rIns="0" bIns="0">
             <a:noAutofit/>
           </a:bodyPr>
           <a:lstStyle/>
@@ -3365,7 +3367,7 @@
           <a:noFill/>
         </p:spPr>
         <p:txBody>
-          <a:bodyPr wrap="none" lIns="0" rIns="0" tIns="0" bIns="0">
+          <a:bodyPr wrap="none" lIns="0" tIns="0" rIns="0" bIns="0">
             <a:noAutofit/>
           </a:bodyPr>
           <a:lstStyle/>
@@ -3410,7 +3412,7 @@
           <a:noFill/>
         </p:spPr>
         <p:txBody>
-          <a:bodyPr wrap="none" lIns="0" rIns="0" tIns="0" bIns="0">
+          <a:bodyPr wrap="none" lIns="0" tIns="0" rIns="0" bIns="0">
             <a:noAutofit/>
           </a:bodyPr>
           <a:lstStyle/>
@@ -3455,7 +3457,7 @@
           <a:noFill/>
         </p:spPr>
         <p:txBody>
-          <a:bodyPr wrap="none" lIns="0" rIns="0" tIns="0" bIns="0">
+          <a:bodyPr wrap="none" lIns="0" tIns="0" rIns="0" bIns="0">
             <a:noAutofit/>
           </a:bodyPr>
           <a:lstStyle/>
@@ -3500,7 +3502,7 @@
           <a:noFill/>
         </p:spPr>
         <p:txBody>
-          <a:bodyPr wrap="none" lIns="0" rIns="0" tIns="0" bIns="0">
+          <a:bodyPr wrap="none" lIns="0" tIns="0" rIns="0" bIns="0">
             <a:noAutofit/>
           </a:bodyPr>
           <a:lstStyle/>
@@ -3545,7 +3547,7 @@
           <a:noFill/>
         </p:spPr>
         <p:txBody>
-          <a:bodyPr wrap="none" lIns="0" rIns="0" tIns="0" bIns="0">
+          <a:bodyPr wrap="none" lIns="0" tIns="0" rIns="0" bIns="0">
             <a:noAutofit/>
           </a:bodyPr>
           <a:lstStyle/>
@@ -3590,7 +3592,7 @@
           <a:noFill/>
         </p:spPr>
         <p:txBody>
-          <a:bodyPr wrap="none" lIns="0" rIns="0" tIns="0" bIns="0">
+          <a:bodyPr wrap="none" lIns="0" tIns="0" rIns="0" bIns="0">
             <a:noAutofit/>
           </a:bodyPr>
           <a:lstStyle/>
@@ -3635,7 +3637,7 @@
           <a:noFill/>
         </p:spPr>
         <p:txBody>
-          <a:bodyPr wrap="none" lIns="0" rIns="0" tIns="0" bIns="0">
+          <a:bodyPr wrap="none" lIns="0" tIns="0" rIns="0" bIns="0">
             <a:noAutofit/>
           </a:bodyPr>
           <a:lstStyle/>
@@ -3680,7 +3682,7 @@
           <a:noFill/>
         </p:spPr>
         <p:txBody>
-          <a:bodyPr wrap="none" lIns="0" rIns="0" tIns="0" bIns="0">
+          <a:bodyPr wrap="none" lIns="0" tIns="0" rIns="0" bIns="0">
             <a:noAutofit/>
           </a:bodyPr>
           <a:lstStyle/>
@@ -3717,7 +3719,7 @@
 </file>
 
 <file path=ppt/slides/slide2.xml><?xml version="1.0" encoding="utf-8"?>
-<p:sld xmlns:a="http://schemas.openxmlformats.org/drawingml/2006/main" xmlns:p="http://schemas.openxmlformats.org/presentationml/2006/main" xmlns:r="http://schemas.openxmlformats.org/officeDocument/2006/relationships">
+<p:sld xmlns:a="http://schemas.openxmlformats.org/drawingml/2006/main" xmlns:r="http://schemas.openxmlformats.org/officeDocument/2006/relationships" xmlns:p="http://schemas.openxmlformats.org/presentationml/2006/main">
   <p:cSld>
     <p:bg>
       <p:bgPr>
@@ -3733,7 +3735,14 @@
         <p:cNvGrpSpPr/>
         <p:nvPr/>
       </p:nvGrpSpPr>
-      <p:grpSpPr/>
+      <p:grpSpPr>
+        <a:xfrm>
+          <a:off x="0" y="0"/>
+          <a:ext cx="0" cy="0"/>
+          <a:chOff x="0" y="0"/>
+          <a:chExt cx="0" cy="0"/>
+        </a:xfrm>
+      </p:grpSpPr>
       <p:sp>
         <p:nvSpPr>
           <p:cNvPr id="2" name="TextBox 1"/>
@@ -3751,7 +3760,7 @@
           <a:noFill/>
         </p:spPr>
         <p:txBody>
-          <a:bodyPr wrap="none" lIns="0" rIns="0" tIns="0" bIns="0">
+          <a:bodyPr wrap="none" lIns="0" tIns="0" rIns="0" bIns="0">
             <a:noAutofit/>
           </a:bodyPr>
           <a:lstStyle/>
@@ -3796,7 +3805,7 @@
           <a:noFill/>
         </p:spPr>
         <p:txBody>
-          <a:bodyPr wrap="none" lIns="0" rIns="0" tIns="0" bIns="0">
+          <a:bodyPr wrap="none" lIns="0" tIns="0" rIns="0" bIns="0">
             <a:noAutofit/>
           </a:bodyPr>
           <a:lstStyle/>
@@ -3841,7 +3850,7 @@
           <a:noFill/>
         </p:spPr>
         <p:txBody>
-          <a:bodyPr wrap="none" lIns="0" rIns="0" tIns="0" bIns="0">
+          <a:bodyPr wrap="none" lIns="0" tIns="0" rIns="0" bIns="0">
             <a:noAutofit/>
           </a:bodyPr>
           <a:lstStyle/>
@@ -3911,6 +3920,7 @@
           <a:lstStyle/>
           <a:p>
             <a:pPr algn="ctr"/>
+            <a:endParaRPr/>
           </a:p>
         </p:txBody>
       </p:sp>
@@ -3931,7 +3941,7 @@
           <a:noFill/>
         </p:spPr>
         <p:txBody>
-          <a:bodyPr wrap="none" lIns="0" rIns="0" tIns="0" bIns="0">
+          <a:bodyPr wrap="none" lIns="0" tIns="0" rIns="0" bIns="0">
             <a:noAutofit/>
           </a:bodyPr>
           <a:lstStyle/>
@@ -3998,7 +4008,7 @@
           <a:noFill/>
         </p:spPr>
         <p:txBody>
-          <a:bodyPr wrap="none" lIns="0" rIns="0" tIns="0" bIns="0">
+          <a:bodyPr wrap="none" lIns="0" tIns="0" rIns="0" bIns="0">
             <a:noAutofit/>
           </a:bodyPr>
           <a:lstStyle/>
@@ -4101,6 +4111,7 @@
           <a:lstStyle/>
           <a:p>
             <a:pPr algn="ctr"/>
+            <a:endParaRPr/>
           </a:p>
         </p:txBody>
       </p:sp>
@@ -4146,6 +4157,7 @@
           <a:lstStyle/>
           <a:p>
             <a:pPr algn="ctr"/>
+            <a:endParaRPr/>
           </a:p>
         </p:txBody>
       </p:sp>
@@ -4166,7 +4178,7 @@
           <a:noFill/>
         </p:spPr>
         <p:txBody>
-          <a:bodyPr wrap="none" lIns="0" rIns="0" tIns="0" bIns="0">
+          <a:bodyPr wrap="none" lIns="0" tIns="0" rIns="0" bIns="0">
             <a:noAutofit/>
           </a:bodyPr>
           <a:lstStyle/>
@@ -4233,7 +4245,7 @@
           <a:noFill/>
         </p:spPr>
         <p:txBody>
-          <a:bodyPr wrap="none" lIns="0" rIns="0" tIns="0" bIns="0">
+          <a:bodyPr wrap="none" lIns="0" tIns="0" rIns="0" bIns="0">
             <a:noAutofit/>
           </a:bodyPr>
           <a:lstStyle/>
@@ -4336,6 +4348,7 @@
           <a:lstStyle/>
           <a:p>
             <a:pPr algn="ctr"/>
+            <a:endParaRPr/>
           </a:p>
         </p:txBody>
       </p:sp>
@@ -4356,7 +4369,7 @@
           <a:noFill/>
         </p:spPr>
         <p:txBody>
-          <a:bodyPr wrap="none" lIns="0" rIns="0" tIns="0" bIns="0">
+          <a:bodyPr wrap="none" lIns="0" tIns="0" rIns="0" bIns="0">
             <a:noAutofit/>
           </a:bodyPr>
           <a:lstStyle/>
@@ -4401,7 +4414,7 @@
           <a:noFill/>
         </p:spPr>
         <p:txBody>
-          <a:bodyPr wrap="none" lIns="0" rIns="0" tIns="0" bIns="0">
+          <a:bodyPr wrap="none" lIns="0" tIns="0" rIns="0" bIns="0">
             <a:noAutofit/>
           </a:bodyPr>
           <a:lstStyle/>
@@ -4471,6 +4484,7 @@
           <a:lstStyle/>
           <a:p>
             <a:pPr algn="ctr"/>
+            <a:endParaRPr/>
           </a:p>
         </p:txBody>
       </p:sp>
@@ -4491,7 +4505,7 @@
           <a:noFill/>
         </p:spPr>
         <p:txBody>
-          <a:bodyPr wrap="none" lIns="0" rIns="0" tIns="0" bIns="0">
+          <a:bodyPr wrap="none" lIns="0" tIns="0" rIns="0" bIns="0">
             <a:noAutofit/>
           </a:bodyPr>
           <a:lstStyle/>
@@ -4536,7 +4550,7 @@
           <a:noFill/>
         </p:spPr>
         <p:txBody>
-          <a:bodyPr wrap="none" lIns="0" rIns="0" tIns="0" bIns="0">
+          <a:bodyPr wrap="none" lIns="0" tIns="0" rIns="0" bIns="0">
             <a:noAutofit/>
           </a:bodyPr>
           <a:lstStyle/>
@@ -4625,7 +4639,7 @@
           <a:noFill/>
         </p:spPr>
         <p:txBody>
-          <a:bodyPr wrap="none" lIns="0" rIns="0" tIns="0" bIns="0">
+          <a:bodyPr wrap="none" lIns="0" tIns="0" rIns="0" bIns="0">
             <a:noAutofit/>
           </a:bodyPr>
           <a:lstStyle/>
@@ -4695,6 +4709,7 @@
           <a:lstStyle/>
           <a:p>
             <a:pPr algn="ctr"/>
+            <a:endParaRPr/>
           </a:p>
         </p:txBody>
       </p:sp>
@@ -4715,7 +4730,7 @@
           <a:noFill/>
         </p:spPr>
         <p:txBody>
-          <a:bodyPr wrap="none" lIns="0" rIns="0" tIns="0" bIns="0">
+          <a:bodyPr wrap="none" lIns="0" tIns="0" rIns="0" bIns="0">
             <a:noAutofit/>
           </a:bodyPr>
           <a:lstStyle/>
@@ -4760,7 +4775,7 @@
           <a:noFill/>
         </p:spPr>
         <p:txBody>
-          <a:bodyPr wrap="none" lIns="0" rIns="0" tIns="0" bIns="0">
+          <a:bodyPr wrap="none" lIns="0" tIns="0" rIns="0" bIns="0">
             <a:noAutofit/>
           </a:bodyPr>
           <a:lstStyle/>
@@ -4871,7 +4886,7 @@
           <a:noFill/>
         </p:spPr>
         <p:txBody>
-          <a:bodyPr wrap="none" lIns="0" rIns="0" tIns="0" bIns="0">
+          <a:bodyPr wrap="none" lIns="0" tIns="0" rIns="0" bIns="0">
             <a:noAutofit/>
           </a:bodyPr>
           <a:lstStyle/>
@@ -4941,6 +4956,7 @@
           <a:lstStyle/>
           <a:p>
             <a:pPr algn="ctr"/>
+            <a:endParaRPr/>
           </a:p>
         </p:txBody>
       </p:sp>
@@ -4961,7 +4977,7 @@
           <a:noFill/>
         </p:spPr>
         <p:txBody>
-          <a:bodyPr wrap="none" lIns="0" rIns="0" tIns="0" bIns="0">
+          <a:bodyPr wrap="none" lIns="0" tIns="0" rIns="0" bIns="0">
             <a:noAutofit/>
           </a:bodyPr>
           <a:lstStyle/>
@@ -5006,7 +5022,7 @@
           <a:noFill/>
         </p:spPr>
         <p:txBody>
-          <a:bodyPr wrap="none" lIns="0" rIns="0" tIns="0" bIns="0">
+          <a:bodyPr wrap="none" lIns="0" tIns="0" rIns="0" bIns="0">
             <a:noAutofit/>
           </a:bodyPr>
           <a:lstStyle/>
@@ -5117,7 +5133,7 @@
           <a:noFill/>
         </p:spPr>
         <p:txBody>
-          <a:bodyPr wrap="none" lIns="0" rIns="0" tIns="0" bIns="0">
+          <a:bodyPr wrap="none" lIns="0" tIns="0" rIns="0" bIns="0">
             <a:noAutofit/>
           </a:bodyPr>
           <a:lstStyle/>
@@ -5162,7 +5178,7 @@
           <a:noFill/>
         </p:spPr>
         <p:txBody>
-          <a:bodyPr wrap="none" lIns="0" rIns="0" tIns="0" bIns="0">
+          <a:bodyPr wrap="none" lIns="0" tIns="0" rIns="0" bIns="0">
             <a:noAutofit/>
           </a:bodyPr>
           <a:lstStyle/>
@@ -5287,6 +5303,7 @@
           <a:lstStyle/>
           <a:p>
             <a:pPr algn="ctr"/>
+            <a:endParaRPr/>
           </a:p>
         </p:txBody>
       </p:sp>
@@ -5307,7 +5324,7 @@
           <a:noFill/>
         </p:spPr>
         <p:txBody>
-          <a:bodyPr wrap="none" lIns="0" rIns="0" tIns="0" bIns="0">
+          <a:bodyPr wrap="none" lIns="0" tIns="0" rIns="0" bIns="0">
             <a:noAutofit/>
           </a:bodyPr>
           <a:lstStyle/>
@@ -5454,6 +5471,7 @@
           <a:lstStyle/>
           <a:p>
             <a:pPr algn="ctr"/>
+            <a:endParaRPr/>
           </a:p>
         </p:txBody>
       </p:sp>
@@ -5474,7 +5492,7 @@
           <a:noFill/>
         </p:spPr>
         <p:txBody>
-          <a:bodyPr wrap="none" lIns="0" rIns="0" tIns="0" bIns="0">
+          <a:bodyPr wrap="none" lIns="0" tIns="0" rIns="0" bIns="0">
             <a:noAutofit/>
           </a:bodyPr>
           <a:lstStyle/>
@@ -5599,6 +5617,7 @@
           <a:lstStyle/>
           <a:p>
             <a:pPr algn="ctr"/>
+            <a:endParaRPr/>
           </a:p>
         </p:txBody>
       </p:sp>
@@ -5619,7 +5638,7 @@
           <a:noFill/>
         </p:spPr>
         <p:txBody>
-          <a:bodyPr wrap="none" lIns="0" rIns="0" tIns="0" bIns="0">
+          <a:bodyPr wrap="none" lIns="0" tIns="0" rIns="0" bIns="0">
             <a:noAutofit/>
           </a:bodyPr>
           <a:lstStyle/>
@@ -5744,6 +5763,7 @@
           <a:lstStyle/>
           <a:p>
             <a:pPr algn="ctr"/>
+            <a:endParaRPr/>
           </a:p>
         </p:txBody>
       </p:sp>
@@ -5764,7 +5784,7 @@
           <a:noFill/>
         </p:spPr>
         <p:txBody>
-          <a:bodyPr wrap="none" lIns="0" rIns="0" tIns="0" bIns="0">
+          <a:bodyPr wrap="none" lIns="0" tIns="0" rIns="0" bIns="0">
             <a:noAutofit/>
           </a:bodyPr>
           <a:lstStyle/>
@@ -5809,7 +5829,7 @@
           <a:noFill/>
         </p:spPr>
         <p:txBody>
-          <a:bodyPr wrap="none" lIns="0" rIns="0" tIns="0" bIns="0">
+          <a:bodyPr wrap="none" lIns="0" tIns="0" rIns="0" bIns="0">
             <a:noAutofit/>
           </a:bodyPr>
           <a:lstStyle/>
@@ -5854,7 +5874,7 @@
           <a:noFill/>
         </p:spPr>
         <p:txBody>
-          <a:bodyPr wrap="none" lIns="0" rIns="0" tIns="0" bIns="0">
+          <a:bodyPr wrap="none" lIns="0" tIns="0" rIns="0" bIns="0">
             <a:noAutofit/>
           </a:bodyPr>
           <a:lstStyle/>
@@ -5891,7 +5911,7 @@
 </file>
 
 <file path=ppt/slides/slide3.xml><?xml version="1.0" encoding="utf-8"?>
-<p:sld xmlns:a="http://schemas.openxmlformats.org/drawingml/2006/main" xmlns:p="http://schemas.openxmlformats.org/presentationml/2006/main" xmlns:r="http://schemas.openxmlformats.org/officeDocument/2006/relationships">
+<p:sld xmlns:a="http://schemas.openxmlformats.org/drawingml/2006/main" xmlns:r="http://schemas.openxmlformats.org/officeDocument/2006/relationships" xmlns:p="http://schemas.openxmlformats.org/presentationml/2006/main">
   <p:cSld>
     <p:bg>
       <p:bgPr>
@@ -5907,7 +5927,14 @@
         <p:cNvGrpSpPr/>
         <p:nvPr/>
       </p:nvGrpSpPr>
-      <p:grpSpPr/>
+      <p:grpSpPr>
+        <a:xfrm>
+          <a:off x="0" y="0"/>
+          <a:ext cx="0" cy="0"/>
+          <a:chOff x="0" y="0"/>
+          <a:chExt cx="0" cy="0"/>
+        </a:xfrm>
+      </p:grpSpPr>
       <p:sp>
         <p:nvSpPr>
           <p:cNvPr id="2" name="TextBox 1"/>
@@ -5925,7 +5952,7 @@
           <a:noFill/>
         </p:spPr>
         <p:txBody>
-          <a:bodyPr wrap="none" lIns="0" rIns="0" tIns="0" bIns="0">
+          <a:bodyPr wrap="none" lIns="0" tIns="0" rIns="0" bIns="0">
             <a:noAutofit/>
           </a:bodyPr>
           <a:lstStyle/>
@@ -5970,7 +5997,7 @@
           <a:noFill/>
         </p:spPr>
         <p:txBody>
-          <a:bodyPr wrap="none" lIns="0" rIns="0" tIns="0" bIns="0">
+          <a:bodyPr wrap="none" lIns="0" tIns="0" rIns="0" bIns="0">
             <a:noAutofit/>
           </a:bodyPr>
           <a:lstStyle/>
@@ -6015,7 +6042,7 @@
           <a:noFill/>
         </p:spPr>
         <p:txBody>
-          <a:bodyPr wrap="none" lIns="0" rIns="0" tIns="0" bIns="0">
+          <a:bodyPr wrap="none" lIns="0" tIns="0" rIns="0" bIns="0">
             <a:noAutofit/>
           </a:bodyPr>
           <a:lstStyle/>
@@ -6060,7 +6087,7 @@
           <a:noFill/>
         </p:spPr>
         <p:txBody>
-          <a:bodyPr wrap="none" lIns="0" rIns="0" tIns="0" bIns="0">
+          <a:bodyPr wrap="none" lIns="0" tIns="0" rIns="0" bIns="0">
             <a:noAutofit/>
           </a:bodyPr>
           <a:lstStyle/>
@@ -6105,7 +6132,7 @@
           <a:noFill/>
         </p:spPr>
         <p:txBody>
-          <a:bodyPr wrap="none" lIns="0" rIns="0" tIns="0" bIns="0">
+          <a:bodyPr wrap="none" lIns="0" tIns="0" rIns="0" bIns="0">
             <a:noAutofit/>
           </a:bodyPr>
           <a:lstStyle/>
@@ -6150,7 +6177,7 @@
           <a:noFill/>
         </p:spPr>
         <p:txBody>
-          <a:bodyPr wrap="none" lIns="0" rIns="0" tIns="0" bIns="0">
+          <a:bodyPr wrap="none" lIns="0" tIns="0" rIns="0" bIns="0">
             <a:noAutofit/>
           </a:bodyPr>
           <a:lstStyle/>
@@ -6195,7 +6222,7 @@
           <a:noFill/>
         </p:spPr>
         <p:txBody>
-          <a:bodyPr wrap="none" lIns="0" rIns="0" tIns="0" bIns="0">
+          <a:bodyPr wrap="none" lIns="0" tIns="0" rIns="0" bIns="0">
             <a:noAutofit/>
           </a:bodyPr>
           <a:lstStyle/>
@@ -6262,7 +6289,7 @@
           <a:noFill/>
         </p:spPr>
         <p:txBody>
-          <a:bodyPr wrap="none" lIns="0" rIns="0" tIns="0" bIns="0">
+          <a:bodyPr wrap="none" lIns="0" tIns="0" rIns="0" bIns="0">
             <a:noAutofit/>
           </a:bodyPr>
           <a:lstStyle/>
@@ -6329,7 +6356,7 @@
           <a:noFill/>
         </p:spPr>
         <p:txBody>
-          <a:bodyPr wrap="none" lIns="0" rIns="0" tIns="0" bIns="0">
+          <a:bodyPr wrap="none" lIns="0" tIns="0" rIns="0" bIns="0">
             <a:noAutofit/>
           </a:bodyPr>
           <a:lstStyle/>
@@ -6374,7 +6401,7 @@
           <a:noFill/>
         </p:spPr>
         <p:txBody>
-          <a:bodyPr wrap="none" lIns="0" rIns="0" tIns="0" bIns="0">
+          <a:bodyPr wrap="none" lIns="0" tIns="0" rIns="0" bIns="0">
             <a:noAutofit/>
           </a:bodyPr>
           <a:lstStyle/>
@@ -6441,7 +6468,7 @@
           <a:noFill/>
         </p:spPr>
         <p:txBody>
-          <a:bodyPr wrap="none" lIns="0" rIns="0" tIns="0" bIns="0">
+          <a:bodyPr wrap="none" lIns="0" tIns="0" rIns="0" bIns="0">
             <a:noAutofit/>
           </a:bodyPr>
           <a:lstStyle/>
@@ -6508,7 +6535,7 @@
           <a:noFill/>
         </p:spPr>
         <p:txBody>
-          <a:bodyPr wrap="none" lIns="0" rIns="0" tIns="0" bIns="0">
+          <a:bodyPr wrap="none" lIns="0" tIns="0" rIns="0" bIns="0">
             <a:noAutofit/>
           </a:bodyPr>
           <a:lstStyle/>
@@ -6553,7 +6580,7 @@
           <a:noFill/>
         </p:spPr>
         <p:txBody>
-          <a:bodyPr wrap="none" lIns="0" rIns="0" tIns="0" bIns="0">
+          <a:bodyPr wrap="none" lIns="0" tIns="0" rIns="0" bIns="0">
             <a:noAutofit/>
           </a:bodyPr>
           <a:lstStyle/>
@@ -6620,7 +6647,7 @@
           <a:noFill/>
         </p:spPr>
         <p:txBody>
-          <a:bodyPr wrap="none" lIns="0" rIns="0" tIns="0" bIns="0">
+          <a:bodyPr wrap="none" lIns="0" tIns="0" rIns="0" bIns="0">
             <a:noAutofit/>
           </a:bodyPr>
           <a:lstStyle/>
@@ -6687,7 +6714,7 @@
           <a:noFill/>
         </p:spPr>
         <p:txBody>
-          <a:bodyPr wrap="none" lIns="0" rIns="0" tIns="0" bIns="0">
+          <a:bodyPr wrap="none" lIns="0" tIns="0" rIns="0" bIns="0">
             <a:noAutofit/>
           </a:bodyPr>
           <a:lstStyle/>
@@ -6732,7 +6759,7 @@
           <a:noFill/>
         </p:spPr>
         <p:txBody>
-          <a:bodyPr wrap="none" lIns="0" rIns="0" tIns="0" bIns="0">
+          <a:bodyPr wrap="none" lIns="0" tIns="0" rIns="0" bIns="0">
             <a:noAutofit/>
           </a:bodyPr>
           <a:lstStyle/>
@@ -6799,7 +6826,7 @@
           <a:noFill/>
         </p:spPr>
         <p:txBody>
-          <a:bodyPr wrap="none" lIns="0" rIns="0" tIns="0" bIns="0">
+          <a:bodyPr wrap="none" lIns="0" tIns="0" rIns="0" bIns="0">
             <a:noAutofit/>
           </a:bodyPr>
           <a:lstStyle/>
@@ -6866,7 +6893,7 @@
           <a:noFill/>
         </p:spPr>
         <p:txBody>
-          <a:bodyPr wrap="none" lIns="0" rIns="0" tIns="0" bIns="0">
+          <a:bodyPr wrap="none" lIns="0" tIns="0" rIns="0" bIns="0">
             <a:noAutofit/>
           </a:bodyPr>
           <a:lstStyle/>
@@ -6911,7 +6938,7 @@
           <a:noFill/>
         </p:spPr>
         <p:txBody>
-          <a:bodyPr wrap="none" lIns="0" rIns="0" tIns="0" bIns="0">
+          <a:bodyPr wrap="none" lIns="0" tIns="0" rIns="0" bIns="0">
             <a:noAutofit/>
           </a:bodyPr>
           <a:lstStyle/>
@@ -6956,7 +6983,7 @@
           <a:noFill/>
         </p:spPr>
         <p:txBody>
-          <a:bodyPr wrap="none" lIns="0" rIns="0" tIns="0" bIns="0">
+          <a:bodyPr wrap="none" lIns="0" tIns="0" rIns="0" bIns="0">
             <a:noAutofit/>
           </a:bodyPr>
           <a:lstStyle/>
@@ -6993,7 +7020,7 @@
 </file>
 
 <file path=ppt/slides/slide4.xml><?xml version="1.0" encoding="utf-8"?>
-<p:sld xmlns:a="http://schemas.openxmlformats.org/drawingml/2006/main" xmlns:p="http://schemas.openxmlformats.org/presentationml/2006/main" xmlns:r="http://schemas.openxmlformats.org/officeDocument/2006/relationships">
+<p:sld xmlns:a="http://schemas.openxmlformats.org/drawingml/2006/main" xmlns:r="http://schemas.openxmlformats.org/officeDocument/2006/relationships" xmlns:p="http://schemas.openxmlformats.org/presentationml/2006/main">
   <p:cSld>
     <p:bg>
       <p:bgPr>
@@ -7009,7 +7036,14 @@
         <p:cNvGrpSpPr/>
         <p:nvPr/>
       </p:nvGrpSpPr>
-      <p:grpSpPr/>
+      <p:grpSpPr>
+        <a:xfrm>
+          <a:off x="0" y="0"/>
+          <a:ext cx="0" cy="0"/>
+          <a:chOff x="0" y="0"/>
+          <a:chExt cx="0" cy="0"/>
+        </a:xfrm>
+      </p:grpSpPr>
       <p:sp>
         <p:nvSpPr>
           <p:cNvPr id="2" name="TextBox 1"/>
@@ -7027,7 +7061,7 @@
           <a:noFill/>
         </p:spPr>
         <p:txBody>
-          <a:bodyPr wrap="none" lIns="0" rIns="0" tIns="0" bIns="0">
+          <a:bodyPr wrap="none" lIns="0" tIns="0" rIns="0" bIns="0">
             <a:noAutofit/>
           </a:bodyPr>
           <a:lstStyle/>
@@ -7072,7 +7106,7 @@
           <a:noFill/>
         </p:spPr>
         <p:txBody>
-          <a:bodyPr wrap="none" lIns="0" rIns="0" tIns="0" bIns="0">
+          <a:bodyPr wrap="none" lIns="0" tIns="0" rIns="0" bIns="0">
             <a:noAutofit/>
           </a:bodyPr>
           <a:lstStyle/>
@@ -7117,7 +7151,7 @@
           <a:noFill/>
         </p:spPr>
         <p:txBody>
-          <a:bodyPr wrap="none" lIns="0" rIns="0" tIns="0" bIns="0">
+          <a:bodyPr wrap="none" lIns="0" tIns="0" rIns="0" bIns="0">
             <a:noAutofit/>
           </a:bodyPr>
           <a:lstStyle/>
@@ -7162,7 +7196,7 @@
           <a:noFill/>
         </p:spPr>
         <p:txBody>
-          <a:bodyPr wrap="none" lIns="0" rIns="0" tIns="0" bIns="0">
+          <a:bodyPr wrap="none" lIns="0" tIns="0" rIns="0" bIns="0">
             <a:noAutofit/>
           </a:bodyPr>
           <a:lstStyle/>
@@ -7207,7 +7241,7 @@
           <a:noFill/>
         </p:spPr>
         <p:txBody>
-          <a:bodyPr wrap="none" lIns="0" rIns="0" tIns="0" bIns="0">
+          <a:bodyPr wrap="none" lIns="0" tIns="0" rIns="0" bIns="0">
             <a:noAutofit/>
           </a:bodyPr>
           <a:lstStyle/>
@@ -7252,7 +7286,7 @@
           <a:noFill/>
         </p:spPr>
         <p:txBody>
-          <a:bodyPr wrap="none" lIns="0" rIns="0" tIns="0" bIns="0">
+          <a:bodyPr wrap="none" lIns="0" tIns="0" rIns="0" bIns="0">
             <a:noAutofit/>
           </a:bodyPr>
           <a:lstStyle/>
@@ -7297,7 +7331,7 @@
           <a:noFill/>
         </p:spPr>
         <p:txBody>
-          <a:bodyPr wrap="none" lIns="0" rIns="0" tIns="0" bIns="0">
+          <a:bodyPr wrap="none" lIns="0" tIns="0" rIns="0" bIns="0">
             <a:noAutofit/>
           </a:bodyPr>
           <a:lstStyle/>
@@ -7364,7 +7398,7 @@
           <a:noFill/>
         </p:spPr>
         <p:txBody>
-          <a:bodyPr wrap="none" lIns="0" rIns="0" tIns="0" bIns="0">
+          <a:bodyPr wrap="none" lIns="0" tIns="0" rIns="0" bIns="0">
             <a:noAutofit/>
           </a:bodyPr>
           <a:lstStyle/>
@@ -7409,7 +7443,7 @@
           <a:noFill/>
         </p:spPr>
         <p:txBody>
-          <a:bodyPr wrap="none" lIns="0" rIns="0" tIns="0" bIns="0">
+          <a:bodyPr wrap="none" lIns="0" tIns="0" rIns="0" bIns="0">
             <a:noAutofit/>
           </a:bodyPr>
           <a:lstStyle/>
@@ -7454,7 +7488,7 @@
           <a:noFill/>
         </p:spPr>
         <p:txBody>
-          <a:bodyPr wrap="none" lIns="0" rIns="0" tIns="0" bIns="0">
+          <a:bodyPr wrap="none" lIns="0" tIns="0" rIns="0" bIns="0">
             <a:noAutofit/>
           </a:bodyPr>
           <a:lstStyle/>
@@ -7521,7 +7555,7 @@
           <a:noFill/>
         </p:spPr>
         <p:txBody>
-          <a:bodyPr wrap="none" lIns="0" rIns="0" tIns="0" bIns="0">
+          <a:bodyPr wrap="none" lIns="0" tIns="0" rIns="0" bIns="0">
             <a:noAutofit/>
           </a:bodyPr>
           <a:lstStyle/>
@@ -7566,7 +7600,7 @@
           <a:noFill/>
         </p:spPr>
         <p:txBody>
-          <a:bodyPr wrap="none" lIns="0" rIns="0" tIns="0" bIns="0">
+          <a:bodyPr wrap="none" lIns="0" tIns="0" rIns="0" bIns="0">
             <a:noAutofit/>
           </a:bodyPr>
           <a:lstStyle/>
@@ -7611,7 +7645,7 @@
           <a:noFill/>
         </p:spPr>
         <p:txBody>
-          <a:bodyPr wrap="none" lIns="0" rIns="0" tIns="0" bIns="0">
+          <a:bodyPr wrap="none" lIns="0" tIns="0" rIns="0" bIns="0">
             <a:noAutofit/>
           </a:bodyPr>
           <a:lstStyle/>
@@ -7678,7 +7712,7 @@
           <a:noFill/>
         </p:spPr>
         <p:txBody>
-          <a:bodyPr wrap="none" lIns="0" rIns="0" tIns="0" bIns="0">
+          <a:bodyPr wrap="none" lIns="0" tIns="0" rIns="0" bIns="0">
             <a:noAutofit/>
           </a:bodyPr>
           <a:lstStyle/>
@@ -7723,7 +7757,7 @@
           <a:noFill/>
         </p:spPr>
         <p:txBody>
-          <a:bodyPr wrap="none" lIns="0" rIns="0" tIns="0" bIns="0">
+          <a:bodyPr wrap="none" lIns="0" tIns="0" rIns="0" bIns="0">
             <a:noAutofit/>
           </a:bodyPr>
           <a:lstStyle/>
@@ -7768,7 +7802,7 @@
           <a:noFill/>
         </p:spPr>
         <p:txBody>
-          <a:bodyPr wrap="none" lIns="0" rIns="0" tIns="0" bIns="0">
+          <a:bodyPr wrap="none" lIns="0" tIns="0" rIns="0" bIns="0">
             <a:noAutofit/>
           </a:bodyPr>
           <a:lstStyle/>
@@ -7835,7 +7869,7 @@
           <a:noFill/>
         </p:spPr>
         <p:txBody>
-          <a:bodyPr wrap="none" lIns="0" rIns="0" tIns="0" bIns="0">
+          <a:bodyPr wrap="none" lIns="0" tIns="0" rIns="0" bIns="0">
             <a:noAutofit/>
           </a:bodyPr>
           <a:lstStyle/>
@@ -7902,7 +7936,7 @@
           <a:noFill/>
         </p:spPr>
         <p:txBody>
-          <a:bodyPr wrap="none" lIns="0" rIns="0" tIns="0" bIns="0">
+          <a:bodyPr wrap="none" lIns="0" tIns="0" rIns="0" bIns="0">
             <a:noAutofit/>
           </a:bodyPr>
           <a:lstStyle/>
@@ -7947,7 +7981,7 @@
           <a:noFill/>
         </p:spPr>
         <p:txBody>
-          <a:bodyPr wrap="none" lIns="0" rIns="0" tIns="0" bIns="0">
+          <a:bodyPr wrap="none" lIns="0" tIns="0" rIns="0" bIns="0">
             <a:noAutofit/>
           </a:bodyPr>
           <a:lstStyle/>
@@ -7992,7 +8026,7 @@
           <a:noFill/>
         </p:spPr>
         <p:txBody>
-          <a:bodyPr wrap="none" lIns="0" rIns="0" tIns="0" bIns="0">
+          <a:bodyPr wrap="none" lIns="0" tIns="0" rIns="0" bIns="0">
             <a:noAutofit/>
           </a:bodyPr>
           <a:lstStyle/>
@@ -8029,7 +8063,7 @@
 </file>
 
 <file path=ppt/slides/slide5.xml><?xml version="1.0" encoding="utf-8"?>
-<p:sld xmlns:a="http://schemas.openxmlformats.org/drawingml/2006/main" xmlns:p="http://schemas.openxmlformats.org/presentationml/2006/main" xmlns:r="http://schemas.openxmlformats.org/officeDocument/2006/relationships">
+<p:sld xmlns:a="http://schemas.openxmlformats.org/drawingml/2006/main" xmlns:r="http://schemas.openxmlformats.org/officeDocument/2006/relationships" xmlns:p="http://schemas.openxmlformats.org/presentationml/2006/main">
   <p:cSld>
     <p:bg>
       <p:bgPr>
@@ -8045,7 +8079,14 @@
         <p:cNvGrpSpPr/>
         <p:nvPr/>
       </p:nvGrpSpPr>
-      <p:grpSpPr/>
+      <p:grpSpPr>
+        <a:xfrm>
+          <a:off x="0" y="0"/>
+          <a:ext cx="0" cy="0"/>
+          <a:chOff x="0" y="0"/>
+          <a:chExt cx="0" cy="0"/>
+        </a:xfrm>
+      </p:grpSpPr>
       <p:sp>
         <p:nvSpPr>
           <p:cNvPr id="2" name="TextBox 1"/>
@@ -8063,7 +8104,7 @@
           <a:noFill/>
         </p:spPr>
         <p:txBody>
-          <a:bodyPr wrap="none" lIns="0" rIns="0" tIns="0" bIns="0">
+          <a:bodyPr wrap="none" lIns="0" tIns="0" rIns="0" bIns="0">
             <a:noAutofit/>
           </a:bodyPr>
           <a:lstStyle/>
@@ -8108,7 +8149,7 @@
           <a:noFill/>
         </p:spPr>
         <p:txBody>
-          <a:bodyPr wrap="none" lIns="0" rIns="0" tIns="0" bIns="0">
+          <a:bodyPr wrap="none" lIns="0" tIns="0" rIns="0" bIns="0">
             <a:noAutofit/>
           </a:bodyPr>
           <a:lstStyle/>
@@ -8153,7 +8194,7 @@
           <a:noFill/>
         </p:spPr>
         <p:txBody>
-          <a:bodyPr wrap="none" lIns="0" rIns="0" tIns="0" bIns="0">
+          <a:bodyPr wrap="none" lIns="0" tIns="0" rIns="0" bIns="0">
             <a:noAutofit/>
           </a:bodyPr>
           <a:lstStyle/>
@@ -8198,7 +8239,7 @@
           <a:noFill/>
         </p:spPr>
         <p:txBody>
-          <a:bodyPr wrap="none" lIns="0" rIns="0" tIns="0" bIns="0">
+          <a:bodyPr wrap="none" lIns="0" tIns="0" rIns="0" bIns="0">
             <a:noAutofit/>
           </a:bodyPr>
           <a:lstStyle/>
@@ -8265,7 +8306,7 @@
           <a:noFill/>
         </p:spPr>
         <p:txBody>
-          <a:bodyPr wrap="none" lIns="0" rIns="0" tIns="0" bIns="0">
+          <a:bodyPr wrap="none" lIns="0" tIns="0" rIns="0" bIns="0">
             <a:noAutofit/>
           </a:bodyPr>
           <a:lstStyle/>
@@ -8332,7 +8373,7 @@
           <a:noFill/>
         </p:spPr>
         <p:txBody>
-          <a:bodyPr wrap="none" lIns="0" rIns="0" tIns="0" bIns="0">
+          <a:bodyPr wrap="none" lIns="0" tIns="0" rIns="0" bIns="0">
             <a:noAutofit/>
           </a:bodyPr>
           <a:lstStyle/>
@@ -8399,7 +8440,7 @@
           <a:noFill/>
         </p:spPr>
         <p:txBody>
-          <a:bodyPr wrap="none" lIns="0" rIns="0" tIns="0" bIns="0">
+          <a:bodyPr wrap="none" lIns="0" tIns="0" rIns="0" bIns="0">
             <a:noAutofit/>
           </a:bodyPr>
           <a:lstStyle/>
@@ -8444,7 +8485,7 @@
           <a:noFill/>
         </p:spPr>
         <p:txBody>
-          <a:bodyPr wrap="none" lIns="0" rIns="0" tIns="0" bIns="0">
+          <a:bodyPr wrap="none" lIns="0" tIns="0" rIns="0" bIns="0">
             <a:noAutofit/>
           </a:bodyPr>
           <a:lstStyle/>
@@ -8511,7 +8552,7 @@
           <a:noFill/>
         </p:spPr>
         <p:txBody>
-          <a:bodyPr wrap="none" lIns="0" rIns="0" tIns="0" bIns="0">
+          <a:bodyPr wrap="none" lIns="0" tIns="0" rIns="0" bIns="0">
             <a:noAutofit/>
           </a:bodyPr>
           <a:lstStyle/>
@@ -8578,7 +8619,7 @@
           <a:noFill/>
         </p:spPr>
         <p:txBody>
-          <a:bodyPr wrap="none" lIns="0" rIns="0" tIns="0" bIns="0">
+          <a:bodyPr wrap="none" lIns="0" tIns="0" rIns="0" bIns="0">
             <a:noAutofit/>
           </a:bodyPr>
           <a:lstStyle/>
@@ -8645,7 +8686,7 @@
           <a:noFill/>
         </p:spPr>
         <p:txBody>
-          <a:bodyPr wrap="none" lIns="0" rIns="0" tIns="0" bIns="0">
+          <a:bodyPr wrap="none" lIns="0" tIns="0" rIns="0" bIns="0">
             <a:noAutofit/>
           </a:bodyPr>
           <a:lstStyle/>
@@ -8690,7 +8731,7 @@
           <a:noFill/>
         </p:spPr>
         <p:txBody>
-          <a:bodyPr wrap="none" lIns="0" rIns="0" tIns="0" bIns="0">
+          <a:bodyPr wrap="none" lIns="0" tIns="0" rIns="0" bIns="0">
             <a:noAutofit/>
           </a:bodyPr>
           <a:lstStyle/>
@@ -8735,7 +8776,7 @@
           <a:noFill/>
         </p:spPr>
         <p:txBody>
-          <a:bodyPr wrap="none" lIns="0" rIns="0" tIns="0" bIns="0">
+          <a:bodyPr wrap="none" lIns="0" tIns="0" rIns="0" bIns="0">
             <a:noAutofit/>
           </a:bodyPr>
           <a:lstStyle/>
@@ -8772,7 +8813,7 @@
 </file>
 
 <file path=ppt/slides/slide6.xml><?xml version="1.0" encoding="utf-8"?>
-<p:sld xmlns:a="http://schemas.openxmlformats.org/drawingml/2006/main" xmlns:p="http://schemas.openxmlformats.org/presentationml/2006/main" xmlns:r="http://schemas.openxmlformats.org/officeDocument/2006/relationships">
+<p:sld xmlns:a="http://schemas.openxmlformats.org/drawingml/2006/main" xmlns:r="http://schemas.openxmlformats.org/officeDocument/2006/relationships" xmlns:p="http://schemas.openxmlformats.org/presentationml/2006/main">
   <p:cSld>
     <p:bg>
       <p:bgPr>
@@ -8788,7 +8829,14 @@
         <p:cNvGrpSpPr/>
         <p:nvPr/>
       </p:nvGrpSpPr>
-      <p:grpSpPr/>
+      <p:grpSpPr>
+        <a:xfrm>
+          <a:off x="0" y="0"/>
+          <a:ext cx="0" cy="0"/>
+          <a:chOff x="0" y="0"/>
+          <a:chExt cx="0" cy="0"/>
+        </a:xfrm>
+      </p:grpSpPr>
       <p:sp>
         <p:nvSpPr>
           <p:cNvPr id="2" name="TextBox 1"/>
@@ -8806,7 +8854,7 @@
           <a:noFill/>
         </p:spPr>
         <p:txBody>
-          <a:bodyPr wrap="none" lIns="0" rIns="0" tIns="0" bIns="0">
+          <a:bodyPr wrap="none" lIns="0" tIns="0" rIns="0" bIns="0">
             <a:noAutofit/>
           </a:bodyPr>
           <a:lstStyle/>
@@ -8851,7 +8899,7 @@
           <a:noFill/>
         </p:spPr>
         <p:txBody>
-          <a:bodyPr wrap="none" lIns="0" rIns="0" tIns="0" bIns="0">
+          <a:bodyPr wrap="none" lIns="0" tIns="0" rIns="0" bIns="0">
             <a:noAutofit/>
           </a:bodyPr>
           <a:lstStyle/>
@@ -8874,7 +8922,16 @@
                 </a:solidFill>
                 <a:latin typeface="Arial"/>
               </a:rPr>
-              <a:t>Robert: where should we focus together?</a:t>
+              <a:t>where </a:t>
+            </a:r>
+            <a:r>
+              <a:rPr sz="3100" b="1" dirty="0">
+                <a:solidFill>
+                  <a:srgbClr val="202124"/>
+                </a:solidFill>
+                <a:latin typeface="Arial"/>
+              </a:rPr>
+              <a:t>should we focus together?</a:t>
             </a:r>
           </a:p>
         </p:txBody>
@@ -8896,7 +8953,7 @@
           <a:noFill/>
         </p:spPr>
         <p:txBody>
-          <a:bodyPr wrap="none" lIns="0" rIns="0" tIns="0" bIns="0">
+          <a:bodyPr wrap="none" lIns="0" tIns="0" rIns="0" bIns="0">
             <a:noAutofit/>
           </a:bodyPr>
           <a:lstStyle/>
@@ -8941,7 +8998,7 @@
           <a:noFill/>
         </p:spPr>
         <p:txBody>
-          <a:bodyPr wrap="none" lIns="0" rIns="0" tIns="0" bIns="0">
+          <a:bodyPr wrap="none" lIns="0" tIns="0" rIns="0" bIns="0">
             <a:noAutofit/>
           </a:bodyPr>
           <a:lstStyle/>
@@ -8986,7 +9043,7 @@
           <a:noFill/>
         </p:spPr>
         <p:txBody>
-          <a:bodyPr wrap="none" lIns="0" rIns="0" tIns="0" bIns="0">
+          <a:bodyPr wrap="none" lIns="0" tIns="0" rIns="0" bIns="0">
             <a:noAutofit/>
           </a:bodyPr>
           <a:lstStyle/>
@@ -9031,7 +9088,7 @@
           <a:noFill/>
         </p:spPr>
         <p:txBody>
-          <a:bodyPr wrap="none" lIns="0" rIns="0" tIns="0" bIns="0">
+          <a:bodyPr wrap="none" lIns="0" tIns="0" rIns="0" bIns="0">
             <a:noAutofit/>
           </a:bodyPr>
           <a:lstStyle/>
@@ -9076,7 +9133,7 @@
           <a:noFill/>
         </p:spPr>
         <p:txBody>
-          <a:bodyPr wrap="none" lIns="0" rIns="0" tIns="0" bIns="0">
+          <a:bodyPr wrap="none" lIns="0" tIns="0" rIns="0" bIns="0">
             <a:noAutofit/>
           </a:bodyPr>
           <a:lstStyle/>
@@ -9121,7 +9178,7 @@
           <a:noFill/>
         </p:spPr>
         <p:txBody>
-          <a:bodyPr wrap="none" lIns="0" rIns="0" tIns="0" bIns="0">
+          <a:bodyPr wrap="none" lIns="0" tIns="0" rIns="0" bIns="0">
             <a:noAutofit/>
           </a:bodyPr>
           <a:lstStyle/>
@@ -9166,7 +9223,7 @@
           <a:noFill/>
         </p:spPr>
         <p:txBody>
-          <a:bodyPr wrap="none" lIns="0" rIns="0" tIns="0" bIns="0">
+          <a:bodyPr wrap="none" lIns="0" tIns="0" rIns="0" bIns="0">
             <a:noAutofit/>
           </a:bodyPr>
           <a:lstStyle/>
@@ -9211,7 +9268,7 @@
           <a:noFill/>
         </p:spPr>
         <p:txBody>
-          <a:bodyPr wrap="none" lIns="0" rIns="0" tIns="0" bIns="0">
+          <a:bodyPr wrap="none" lIns="0" tIns="0" rIns="0" bIns="0">
             <a:noAutofit/>
           </a:bodyPr>
           <a:lstStyle/>
@@ -9278,7 +9335,7 @@
           <a:noFill/>
         </p:spPr>
         <p:txBody>
-          <a:bodyPr wrap="none" lIns="0" rIns="0" tIns="0" bIns="0">
+          <a:bodyPr wrap="none" lIns="0" tIns="0" rIns="0" bIns="0">
             <a:noAutofit/>
           </a:bodyPr>
           <a:lstStyle/>
@@ -9323,7 +9380,7 @@
           <a:noFill/>
         </p:spPr>
         <p:txBody>
-          <a:bodyPr wrap="none" lIns="0" rIns="0" tIns="0" bIns="0">
+          <a:bodyPr wrap="none" lIns="0" tIns="0" rIns="0" bIns="0">
             <a:noAutofit/>
           </a:bodyPr>
           <a:lstStyle/>
@@ -9368,7 +9425,7 @@
           <a:noFill/>
         </p:spPr>
         <p:txBody>
-          <a:bodyPr wrap="none" lIns="0" rIns="0" tIns="0" bIns="0">
+          <a:bodyPr wrap="none" lIns="0" tIns="0" rIns="0" bIns="0">
             <a:noAutofit/>
           </a:bodyPr>
           <a:lstStyle/>
@@ -9722,4 +9779,10 @@
   </a:objectDefaults>
   <a:extraClrSchemeLst/>
 </a:theme>
+</file>
+
+<file path=docMetadata/LabelInfo.xml><?xml version="1.0" encoding="utf-8"?>
+<clbl:labelList xmlns:clbl="http://schemas.microsoft.com/office/2020/mipLabelMetadata">
+  <clbl:label id="{f42aa342-8706-4288-bd11-ebb85995028c}" enabled="1" method="Standard" siteId="{72f988bf-86f1-41af-91ab-2d7cd011db47}" contentBits="0" removed="0"/>
+</clbl:labelList>
 </file>
--- a/docs/presentation/technical-presentation.pptx
+++ b/docs/presentation/technical-presentation.pptx
@@ -3137,13 +3137,13 @@
               </a:spcAft>
             </a:pPr>
             <a:r>
-              <a:rPr sz="1100" b="1">
+              <a:rPr sz="1100" b="1" dirty="0">
                 <a:solidFill>
                   <a:srgbClr val="245D74"/>
                 </a:solidFill>
                 <a:latin typeface="Arial"/>
               </a:rPr>
-              <a:t>THE CONNECTION TO GDT / 2 MIN</a:t>
+              <a:t>THE CONNECTION TO GDT</a:t>
             </a:r>
           </a:p>
         </p:txBody>
@@ -3777,13 +3777,13 @@
               </a:spcAft>
             </a:pPr>
             <a:r>
-              <a:rPr sz="1100" b="1">
+              <a:rPr sz="1100" b="1" dirty="0">
                 <a:solidFill>
                   <a:srgbClr val="245D74"/>
                 </a:solidFill>
                 <a:latin typeface="Arial"/>
               </a:rPr>
-              <a:t>WHAT IS IMPLEMENTED TODAY / 4 MIN</a:t>
+              <a:t>WHAT IS IMPLEMENTED TODAY </a:t>
             </a:r>
           </a:p>
         </p:txBody>
@@ -5969,13 +5969,13 @@
               </a:spcAft>
             </a:pPr>
             <a:r>
-              <a:rPr sz="1100" b="1">
+              <a:rPr sz="1100" b="1" dirty="0">
                 <a:solidFill>
                   <a:srgbClr val="245D74"/>
                 </a:solidFill>
                 <a:latin typeface="Arial"/>
               </a:rPr>
-              <a:t>SIDE-BY-SIDE COMPARISON / 3 MIN</a:t>
+              <a:t>SIDE-BY-SIDE COMPARISON </a:t>
             </a:r>
           </a:p>
         </p:txBody>
@@ -7078,13 +7078,13 @@
               </a:spcAft>
             </a:pPr>
             <a:r>
-              <a:rPr sz="1100" b="1">
+              <a:rPr sz="1100" b="1" dirty="0">
                 <a:solidFill>
                   <a:srgbClr val="245D74"/>
                 </a:solidFill>
                 <a:latin typeface="Arial"/>
               </a:rPr>
-              <a:t>MAKE THE IDEA CONCRETE / 4 MIN</a:t>
+              <a:t>MAKE THE IDEA CONCRETE</a:t>
             </a:r>
           </a:p>
         </p:txBody>
@@ -8121,13 +8121,13 @@
               </a:spcAft>
             </a:pPr>
             <a:r>
-              <a:rPr sz="1100" b="1">
+              <a:rPr sz="1100" b="1" dirty="0">
                 <a:solidFill>
                   <a:srgbClr val="245D74"/>
                 </a:solidFill>
                 <a:latin typeface="Arial"/>
               </a:rPr>
-              <a:t>PRODUCTION READINESS - WORK TO DO / 4 MIN</a:t>
+              <a:t>PRODUCTION READINESS - WORK TO DO</a:t>
             </a:r>
           </a:p>
         </p:txBody>
@@ -8703,7 +8703,7 @@
               </a:spcAft>
             </a:pPr>
             <a:r>
-              <a:rPr sz="1500" b="0">
+              <a:rPr sz="1500" b="0" dirty="0">
                 <a:solidFill>
                   <a:srgbClr val="5D6268"/>
                 </a:solidFill>
@@ -8871,13 +8871,13 @@
               </a:spcAft>
             </a:pPr>
             <a:r>
-              <a:rPr sz="1100" b="1">
+              <a:rPr sz="1100" b="1" dirty="0">
                 <a:solidFill>
                   <a:srgbClr val="245D74"/>
                 </a:solidFill>
                 <a:latin typeface="Arial"/>
               </a:rPr>
-              <a:t>REVIEW QUESTIONS + NEXT STEP / 3 MIN</a:t>
+              <a:t>REVIEW QUESTIONS + NEXT STEP</a:t>
             </a:r>
           </a:p>
         </p:txBody>
@@ -8916,22 +8916,13 @@
               </a:spcAft>
             </a:pPr>
             <a:r>
-              <a:rPr sz="3100" b="1">
+              <a:rPr sz="3100" b="1" dirty="0">
                 <a:solidFill>
                   <a:srgbClr val="202124"/>
                 </a:solidFill>
                 <a:latin typeface="Arial"/>
               </a:rPr>
-              <a:t>where </a:t>
-            </a:r>
-            <a:r>
-              <a:rPr sz="3100" b="1" dirty="0">
-                <a:solidFill>
-                  <a:srgbClr val="202124"/>
-                </a:solidFill>
-                <a:latin typeface="Arial"/>
-              </a:rPr>
-              <a:t>should we focus together?</a:t>
+              <a:t>where should we focus together?</a:t>
             </a:r>
           </a:p>
         </p:txBody>
@@ -9351,15 +9342,12 @@
                 <a:spcPts val="0"/>
               </a:spcAft>
             </a:pPr>
-            <a:r>
-              <a:rPr sz="1500" b="0">
-                <a:solidFill>
-                  <a:srgbClr val="5D6268"/>
-                </a:solidFill>
-                <a:latin typeface="Arial"/>
-              </a:rPr>
-              <a:t>Proposed: two-week demo preparation, then a readiness decision. Not a production launch.</a:t>
-            </a:r>
+            <a:endParaRPr sz="1500" b="0" dirty="0">
+              <a:solidFill>
+                <a:srgbClr val="5D6268"/>
+              </a:solidFill>
+              <a:latin typeface="Arial"/>
+            </a:endParaRPr>
           </a:p>
         </p:txBody>
       </p:sp>
